--- a/output/GroupedBoxplot2.pptx
+++ b/output/GroupedBoxplot2.pptx
@@ -161,10 +161,10 @@
           <a:bodyPr/>
           <a:lstStyle/>
           <a:p>
-            <a:fld id="{C8962EE0-9E06-D44A-B45F-07141E78AD10}" type="datetimeFigureOut">
+            <a:fld id="{5FB552F6-9664-4C4B-9F38-04FD59B89DE4}" type="datetimeFigureOut">
               <a:rPr lang="en-GB" smtClean="0"/>
               <a:pPr/>
-              <a:t>03/22/26</a:t>
+              <a:t>03/25/26</a:t>
             </a:fld>
             <a:endParaRPr lang="en-GB"/>
           </a:p>
@@ -190,7 +190,7 @@
           <a:bodyPr/>
           <a:lstStyle/>
           <a:p>
-            <a:fld id="{218D0FF8-BB5C-4E44-BAE0-3E9B17CC27B8}" type="slidenum">
+            <a:fld id="{C3AB6E8B-BA66-9E4F-B591-304C139DEA20}" type="slidenum">
               <a:rPr lang="en-GB" smtClean="0"/>
               <a:pPr/>
               <a:t>‹#›</a:t>
@@ -2468,10 +2468,10 @@
             </a:lvl1pPr>
           </a:lstStyle>
           <a:p>
-            <a:fld id="{C8962EE0-9E06-D44A-B45F-07141E78AD10}" type="datetimeFigureOut">
+            <a:fld id="{5FB552F6-9664-4C4B-9F38-04FD59B89DE4}" type="datetimeFigureOut">
               <a:rPr lang="en-GB" smtClean="0"/>
               <a:pPr/>
-              <a:t>03/22/26</a:t>
+              <a:t>03/25/26</a:t>
             </a:fld>
             <a:endParaRPr lang="en-GB"/>
           </a:p>
@@ -2549,7 +2549,7 @@
             </a:lvl1pPr>
           </a:lstStyle>
           <a:p>
-            <a:fld id="{218D0FF8-BB5C-4E44-BAE0-3E9B17CC27B8}" type="slidenum">
+            <a:fld id="{C3AB6E8B-BA66-9E4F-B591-304C139DEA20}" type="slidenum">
               <a:rPr lang="en-GB" smtClean="0"/>
               <a:pPr/>
               <a:t>‹#›</a:t>
@@ -2980,14 +2980,14 @@
           <a:lstStyle/>
           <a:p>
             <a:pPr algn="l"/>
-            <a:fld id="{C8962EE0-9E06-D44A-B45F-07141E78AD10}" type="datetime1">
+            <a:fld id="{5FB552F6-9664-4C4B-9F38-04FD59B89DE4}" type="datetime1">
               <a:rPr smtClean="0" dirty="0" sz="900" lang="en-GB">
                 <a:solidFill>
                   <a:schemeClr val="tx1"/>
                 </a:solidFill>
                 <a:latin typeface="+mn-lt"/>
               </a:rPr>
-              <a:t>Sunday, March 22, 2026</a:t>
+              <a:t>Wednesday, March 25, 2026</a:t>
             </a:fld>
             <a:endParaRPr lang="en-GB" dirty="0">
               <a:solidFill>
@@ -3019,7 +3019,7 @@
           <a:lstStyle/>
           <a:p>
             <a:pPr algn="r"/>
-            <a:fld id="{218D0FF8-BB5C-4E44-BAE0-3E9B17CC27B8}" type="slidenum">
+            <a:fld id="{C3AB6E8B-BA66-9E4F-B591-304C139DEA20}" type="slidenum">
               <a:rPr smtClean="0" dirty="0" sz="900" lang="en-GB">
                 <a:solidFill>
                   <a:schemeClr val="tx1"/>
